--- a/ゲーム科1年/00_前期/ゲームプログラミングⅢ/02_Excelでマップエディタ（VBA側）.pptx
+++ b/ゲーム科1年/00_前期/ゲームプログラミングⅢ/02_Excelでマップエディタ（VBA側）.pptx
@@ -269,7 +269,7 @@
           <a:p>
             <a:fld id="{E9CC885B-4903-4D54-9A93-00025F12DED9}" type="datetimeFigureOut">
               <a:rPr kumimoji="1" lang="ja-JP" altLang="en-US" smtClean="0"/>
-              <a:t>2024/11/14</a:t>
+              <a:t>2026/6/22</a:t>
             </a:fld>
             <a:endParaRPr kumimoji="1" lang="ja-JP" altLang="en-US"/>
           </a:p>
@@ -499,7 +499,7 @@
           <a:p>
             <a:fld id="{E9CC885B-4903-4D54-9A93-00025F12DED9}" type="datetimeFigureOut">
               <a:rPr kumimoji="1" lang="ja-JP" altLang="en-US" smtClean="0"/>
-              <a:t>2024/11/14</a:t>
+              <a:t>2026/6/22</a:t>
             </a:fld>
             <a:endParaRPr kumimoji="1" lang="ja-JP" altLang="en-US"/>
           </a:p>
@@ -739,7 +739,7 @@
           <a:p>
             <a:fld id="{E9CC885B-4903-4D54-9A93-00025F12DED9}" type="datetimeFigureOut">
               <a:rPr kumimoji="1" lang="ja-JP" altLang="en-US" smtClean="0"/>
-              <a:t>2024/11/14</a:t>
+              <a:t>2026/6/22</a:t>
             </a:fld>
             <a:endParaRPr kumimoji="1" lang="ja-JP" altLang="en-US"/>
           </a:p>
@@ -969,7 +969,7 @@
           <a:p>
             <a:fld id="{E9CC885B-4903-4D54-9A93-00025F12DED9}" type="datetimeFigureOut">
               <a:rPr kumimoji="1" lang="ja-JP" altLang="en-US" smtClean="0"/>
-              <a:t>2024/11/14</a:t>
+              <a:t>2026/6/22</a:t>
             </a:fld>
             <a:endParaRPr kumimoji="1" lang="ja-JP" altLang="en-US"/>
           </a:p>
@@ -1244,7 +1244,7 @@
           <a:p>
             <a:fld id="{E9CC885B-4903-4D54-9A93-00025F12DED9}" type="datetimeFigureOut">
               <a:rPr kumimoji="1" lang="ja-JP" altLang="en-US" smtClean="0"/>
-              <a:t>2024/11/14</a:t>
+              <a:t>2026/6/22</a:t>
             </a:fld>
             <a:endParaRPr kumimoji="1" lang="ja-JP" altLang="en-US"/>
           </a:p>
@@ -1573,7 +1573,7 @@
           <a:p>
             <a:fld id="{E9CC885B-4903-4D54-9A93-00025F12DED9}" type="datetimeFigureOut">
               <a:rPr kumimoji="1" lang="ja-JP" altLang="en-US" smtClean="0"/>
-              <a:t>2024/11/14</a:t>
+              <a:t>2026/6/22</a:t>
             </a:fld>
             <a:endParaRPr kumimoji="1" lang="ja-JP" altLang="en-US"/>
           </a:p>
@@ -2049,7 +2049,7 @@
           <a:p>
             <a:fld id="{E9CC885B-4903-4D54-9A93-00025F12DED9}" type="datetimeFigureOut">
               <a:rPr kumimoji="1" lang="ja-JP" altLang="en-US" smtClean="0"/>
-              <a:t>2024/11/14</a:t>
+              <a:t>2026/6/22</a:t>
             </a:fld>
             <a:endParaRPr kumimoji="1" lang="ja-JP" altLang="en-US"/>
           </a:p>
@@ -2190,7 +2190,7 @@
           <a:p>
             <a:fld id="{E9CC885B-4903-4D54-9A93-00025F12DED9}" type="datetimeFigureOut">
               <a:rPr kumimoji="1" lang="ja-JP" altLang="en-US" smtClean="0"/>
-              <a:t>2024/11/14</a:t>
+              <a:t>2026/6/22</a:t>
             </a:fld>
             <a:endParaRPr kumimoji="1" lang="ja-JP" altLang="en-US"/>
           </a:p>
@@ -2303,7 +2303,7 @@
           <a:p>
             <a:fld id="{E9CC885B-4903-4D54-9A93-00025F12DED9}" type="datetimeFigureOut">
               <a:rPr kumimoji="1" lang="ja-JP" altLang="en-US" smtClean="0"/>
-              <a:t>2024/11/14</a:t>
+              <a:t>2026/6/22</a:t>
             </a:fld>
             <a:endParaRPr kumimoji="1" lang="ja-JP" altLang="en-US"/>
           </a:p>
@@ -2646,7 +2646,7 @@
           <a:p>
             <a:fld id="{E9CC885B-4903-4D54-9A93-00025F12DED9}" type="datetimeFigureOut">
               <a:rPr kumimoji="1" lang="ja-JP" altLang="en-US" smtClean="0"/>
-              <a:t>2024/11/14</a:t>
+              <a:t>2026/6/22</a:t>
             </a:fld>
             <a:endParaRPr kumimoji="1" lang="ja-JP" altLang="en-US"/>
           </a:p>
@@ -2934,7 +2934,7 @@
           <a:p>
             <a:fld id="{E9CC885B-4903-4D54-9A93-00025F12DED9}" type="datetimeFigureOut">
               <a:rPr kumimoji="1" lang="ja-JP" altLang="en-US" smtClean="0"/>
-              <a:t>2024/11/14</a:t>
+              <a:t>2026/6/22</a:t>
             </a:fld>
             <a:endParaRPr kumimoji="1" lang="ja-JP" altLang="en-US"/>
           </a:p>
@@ -3207,7 +3207,7 @@
           <a:p>
             <a:fld id="{E9CC885B-4903-4D54-9A93-00025F12DED9}" type="datetimeFigureOut">
               <a:rPr kumimoji="1" lang="ja-JP" altLang="en-US" smtClean="0"/>
-              <a:t>2024/11/14</a:t>
+              <a:t>2026/6/22</a:t>
             </a:fld>
             <a:endParaRPr kumimoji="1" lang="ja-JP" altLang="en-US"/>
           </a:p>
@@ -4084,7 +4084,7 @@
         <p:spPr>
           <a:xfrm>
             <a:off x="567542" y="1216429"/>
-            <a:ext cx="10015883" cy="2308324"/>
+            <a:ext cx="11246990" cy="3785652"/>
           </a:xfrm>
           <a:prstGeom prst="rect">
             <a:avLst/>
@@ -4145,8 +4145,59 @@
           </a:p>
           <a:p>
             <a:r>
-              <a:rPr kumimoji="1" lang="ja-JP" altLang="en-US" sz="2400"/>
+              <a:rPr kumimoji="1" lang="ja-JP" altLang="en-US" sz="2400" dirty="0"/>
               <a:t>有効に使っていきましょう。</a:t>
+            </a:r>
+            <a:endParaRPr kumimoji="1" lang="en-US" altLang="ja-JP" sz="2400" dirty="0"/>
+          </a:p>
+          <a:p>
+            <a:endParaRPr lang="en-US" altLang="ja-JP" sz="2400" dirty="0"/>
+          </a:p>
+          <a:p>
+            <a:r>
+              <a:rPr kumimoji="1" lang="en-US" altLang="ja-JP" sz="2400" b="1" dirty="0">
+                <a:solidFill>
+                  <a:srgbClr val="00B050"/>
+                </a:solidFill>
+              </a:rPr>
+              <a:t>MEMO</a:t>
+            </a:r>
+          </a:p>
+          <a:p>
+            <a:r>
+              <a:rPr lang="ja-JP" altLang="en-US" sz="2400" dirty="0"/>
+              <a:t>最近では、</a:t>
+            </a:r>
+            <a:r>
+              <a:rPr kumimoji="1" lang="en-US" altLang="ja-JP" sz="2400" dirty="0"/>
+              <a:t>VBA</a:t>
+            </a:r>
+            <a:r>
+              <a:rPr kumimoji="1" lang="ja-JP" altLang="en-US" sz="2400" dirty="0"/>
+              <a:t>など小規模なプログラムは</a:t>
+            </a:r>
+            <a:r>
+              <a:rPr kumimoji="1" lang="en-US" altLang="ja-JP" sz="2400" dirty="0"/>
+              <a:t>AI</a:t>
+            </a:r>
+            <a:r>
+              <a:rPr kumimoji="1" lang="ja-JP" altLang="en-US" sz="2400" dirty="0"/>
+              <a:t>に書かせた方が正確で速いです。</a:t>
+            </a:r>
+            <a:endParaRPr kumimoji="1" lang="en-US" altLang="ja-JP" sz="2400" dirty="0"/>
+          </a:p>
+          <a:p>
+            <a:r>
+              <a:rPr lang="ja-JP" altLang="en-US" sz="2400" dirty="0"/>
+              <a:t>ゲームプログラミングは大規模が想定されるので</a:t>
+            </a:r>
+            <a:r>
+              <a:rPr lang="en-US" altLang="ja-JP" sz="2400" dirty="0"/>
+              <a:t>AI</a:t>
+            </a:r>
+            <a:r>
+              <a:rPr lang="ja-JP" altLang="en-US" sz="2400" dirty="0"/>
+              <a:t>は使わないでおきましょう。</a:t>
             </a:r>
             <a:endParaRPr kumimoji="1" lang="en-US" altLang="ja-JP" sz="2400" dirty="0"/>
           </a:p>
@@ -4269,7 +4320,11 @@
           </a:p>
           <a:p>
             <a:r>
-              <a:rPr kumimoji="1" lang="en-US" altLang="ja-JP" sz="2400" dirty="0"/>
+              <a:rPr kumimoji="1" lang="en-US" altLang="ja-JP" sz="2400" b="1" dirty="0">
+                <a:solidFill>
+                  <a:srgbClr val="00B050"/>
+                </a:solidFill>
+              </a:rPr>
               <a:t>Excel</a:t>
             </a:r>
             <a:r>
